--- a/downloads/rooms/ecosystem.pptx
+++ b/downloads/rooms/ecosystem.pptx
@@ -8,6 +8,8 @@
     <p:sldId id="256" r:id="rId7"/>
     <p:sldId id="257" r:id="rId8"/>
     <p:sldId id="258" r:id="rId9"/>
+    <p:sldId id="259" r:id="rId10"/>
+    <p:sldId id="260" r:id="rId11"/>
   </p:sldIdLst>
   <p:sldSz cx="12191695" cy="6858000" type="screen4x3"/>
   <p:notesSz cx="6858000" cy="9144000"/>
@@ -3099,7 +3101,7 @@
         <p:spPr>
           <a:xfrm>
             <a:off x="457200" y="274320"/>
-            <a:ext cx="11155680" cy="731520"/>
+            <a:ext cx="11155680" cy="640080"/>
           </a:xfrm>
           <a:prstGeom prst="rect">
             <a:avLst/>
@@ -3129,8 +3131,8 @@
         </p:nvSpPr>
         <p:spPr>
           <a:xfrm>
-            <a:off x="548640" y="1188720"/>
-            <a:ext cx="10972800" cy="4206240"/>
+            <a:off x="548640" y="1051560"/>
+            <a:ext cx="10972800" cy="4297680"/>
           </a:xfrm>
           <a:prstGeom prst="rect">
             <a:avLst/>
@@ -3322,7 +3324,7 @@
         <p:spPr>
           <a:xfrm>
             <a:off x="457200" y="274320"/>
-            <a:ext cx="11155680" cy="731520"/>
+            <a:ext cx="11155680" cy="640080"/>
           </a:xfrm>
           <a:prstGeom prst="rect">
             <a:avLst/>
@@ -3352,8 +3354,8 @@
         </p:nvSpPr>
         <p:spPr>
           <a:xfrm>
-            <a:off x="548640" y="1188720"/>
-            <a:ext cx="10972800" cy="4206240"/>
+            <a:off x="548640" y="1051560"/>
+            <a:ext cx="10972800" cy="4297680"/>
           </a:xfrm>
           <a:prstGeom prst="rect">
             <a:avLst/>
@@ -3537,7 +3539,7 @@
         <p:spPr>
           <a:xfrm>
             <a:off x="457200" y="274320"/>
-            <a:ext cx="11155680" cy="731520"/>
+            <a:ext cx="11155680" cy="640080"/>
           </a:xfrm>
           <a:prstGeom prst="rect">
             <a:avLst/>
@@ -3567,8 +3569,8 @@
         </p:nvSpPr>
         <p:spPr>
           <a:xfrm>
-            <a:off x="548640" y="1188720"/>
-            <a:ext cx="10972800" cy="4206240"/>
+            <a:off x="548640" y="1051560"/>
+            <a:ext cx="10972800" cy="4297680"/>
           </a:xfrm>
           <a:prstGeom prst="rect">
             <a:avLst/>
@@ -3594,6 +3596,524 @@
             </a:pPr>
             <a:r>
               <a:t>Contact is the form on the lab website.</a:t>
+            </a:r>
+          </a:p>
+        </p:txBody>
+      </p:sp>
+      <p:sp>
+        <p:nvSpPr>
+          <p:cNvPr id="4" name="TextBox 3"/>
+          <p:cNvSpPr txBox="1"/>
+          <p:nvPr/>
+        </p:nvSpPr>
+        <p:spPr>
+          <a:xfrm>
+            <a:off x="457200" y="5623560"/>
+            <a:ext cx="11155680" cy="1005840"/>
+          </a:xfrm>
+          <a:prstGeom prst="rect">
+            <a:avLst/>
+          </a:prstGeom>
+          <a:noFill/>
+        </p:spPr>
+        <p:txBody>
+          <a:bodyPr wrap="square">
+            <a:spAutoFit/>
+          </a:bodyPr>
+          <a:lstStyle/>
+          <a:p>
+            <a:pPr>
+              <a:defRPr sz="1000"/>
+            </a:pPr>
+            <a:r>
+              <a:t>CypherMonkey Labs · © 2026 CypherMonkeyLabs</a:t>
+            </a:r>
+          </a:p>
+          <a:p>
+            <a:r>
+              <a:t>Independent, free, learning-only student project. Respects every company and vendor. Trademarks belong to their owners. Not affiliated or endorsed. Concerns are removed or corrected promptly via the contact form at https</a:t>
+            </a:r>
+          </a:p>
+        </p:txBody>
+      </p:sp>
+      <p:sp>
+        <p:nvSpPr>
+          <p:cNvPr id="5" name="TextBox 4">
+            <a:hlinkClick r:id="rId2"/>
+          </p:cNvPr>
+          <p:cNvSpPr txBox="1"/>
+          <p:nvPr/>
+        </p:nvSpPr>
+        <p:spPr>
+          <a:xfrm>
+            <a:off x="457200" y="6355080"/>
+            <a:ext cx="2011680" cy="320040"/>
+          </a:xfrm>
+          <a:prstGeom prst="rect">
+            <a:avLst/>
+          </a:prstGeom>
+          <a:noFill/>
+        </p:spPr>
+        <p:txBody>
+          <a:bodyPr wrap="none">
+            <a:spAutoFit/>
+          </a:bodyPr>
+          <a:lstStyle/>
+          <a:p>
+            <a:pPr>
+              <a:defRPr sz="1200"/>
+            </a:pPr>
+            <a:r>
+              <a:t>Website</a:t>
+            </a:r>
+          </a:p>
+        </p:txBody>
+      </p:sp>
+      <p:sp>
+        <p:nvSpPr>
+          <p:cNvPr id="6" name="TextBox 5">
+            <a:hlinkClick r:id="rId3"/>
+          </p:cNvPr>
+          <p:cNvSpPr txBox="1"/>
+          <p:nvPr/>
+        </p:nvSpPr>
+        <p:spPr>
+          <a:xfrm>
+            <a:off x="2560320" y="6355080"/>
+            <a:ext cx="2011680" cy="320040"/>
+          </a:xfrm>
+          <a:prstGeom prst="rect">
+            <a:avLst/>
+          </a:prstGeom>
+          <a:noFill/>
+        </p:spPr>
+        <p:txBody>
+          <a:bodyPr wrap="none">
+            <a:spAutoFit/>
+          </a:bodyPr>
+          <a:lstStyle/>
+          <a:p>
+            <a:pPr>
+              <a:defRPr sz="1200"/>
+            </a:pPr>
+            <a:r>
+              <a:t>GitHub</a:t>
+            </a:r>
+          </a:p>
+        </p:txBody>
+      </p:sp>
+      <p:sp>
+        <p:nvSpPr>
+          <p:cNvPr id="7" name="TextBox 6">
+            <a:hlinkClick r:id="rId4"/>
+          </p:cNvPr>
+          <p:cNvSpPr txBox="1"/>
+          <p:nvPr/>
+        </p:nvSpPr>
+        <p:spPr>
+          <a:xfrm>
+            <a:off x="4663440" y="6355080"/>
+            <a:ext cx="2011680" cy="320040"/>
+          </a:xfrm>
+          <a:prstGeom prst="rect">
+            <a:avLst/>
+          </a:prstGeom>
+          <a:noFill/>
+        </p:spPr>
+        <p:txBody>
+          <a:bodyPr wrap="none">
+            <a:spAutoFit/>
+          </a:bodyPr>
+          <a:lstStyle/>
+          <a:p>
+            <a:pPr>
+              <a:defRPr sz="1200"/>
+            </a:pPr>
+            <a:r>
+              <a:t>Profile</a:t>
+            </a:r>
+          </a:p>
+        </p:txBody>
+      </p:sp>
+    </p:spTree>
+  </p:cSld>
+  <p:clrMapOvr>
+    <a:masterClrMapping/>
+  </p:clrMapOvr>
+</p:sld>
+</file>
+
+<file path=ppt/slides/slide4.xml><?xml version="1.0" encoding="utf-8"?>
+<p:sld xmlns:a="http://schemas.openxmlformats.org/drawingml/2006/main" xmlns:p="http://schemas.openxmlformats.org/presentationml/2006/main" xmlns:r="http://schemas.openxmlformats.org/officeDocument/2006/relationships">
+  <p:cSld>
+    <p:spTree>
+      <p:nvGrpSpPr>
+        <p:cNvPr id="1" name=""/>
+        <p:cNvGrpSpPr/>
+        <p:nvPr/>
+      </p:nvGrpSpPr>
+      <p:grpSpPr/>
+      <p:sp>
+        <p:nvSpPr>
+          <p:cNvPr id="2" name="TextBox 1"/>
+          <p:cNvSpPr txBox="1"/>
+          <p:nvPr/>
+        </p:nvSpPr>
+        <p:spPr>
+          <a:xfrm>
+            <a:off x="457200" y="274320"/>
+            <a:ext cx="11155680" cy="640080"/>
+          </a:xfrm>
+          <a:prstGeom prst="rect">
+            <a:avLst/>
+          </a:prstGeom>
+          <a:noFill/>
+        </p:spPr>
+        <p:txBody>
+          <a:bodyPr wrap="none">
+            <a:spAutoFit/>
+          </a:bodyPr>
+          <a:lstStyle/>
+          <a:p>
+            <a:pPr>
+              <a:defRPr sz="2800" b="1"/>
+            </a:pPr>
+            <a:r>
+              <a:t>Sources and go deeper</a:t>
+            </a:r>
+          </a:p>
+        </p:txBody>
+      </p:sp>
+      <p:sp>
+        <p:nvSpPr>
+          <p:cNvPr id="3" name="TextBox 2"/>
+          <p:cNvSpPr txBox="1"/>
+          <p:nvPr/>
+        </p:nvSpPr>
+        <p:spPr>
+          <a:xfrm>
+            <a:off x="548640" y="1051560"/>
+            <a:ext cx="10972800" cy="4297680"/>
+          </a:xfrm>
+          <a:prstGeom prst="rect">
+            <a:avLst/>
+          </a:prstGeom>
+          <a:noFill/>
+        </p:spPr>
+        <p:txBody>
+          <a:bodyPr wrap="square">
+            <a:spAutoFit/>
+          </a:bodyPr>
+          <a:lstStyle/>
+          <a:p>
+            <a:pPr>
+              <a:defRPr sz="1400"/>
+            </a:pPr>
+            <a:r>
+              <a:t>IIBA KnowledgeHub, including the BABOK Guide contents (standard). https://www.iiba.org/knowledgehub/ last checked 2026-10.</a:t>
+            </a:r>
+          </a:p>
+          <a:p>
+            <a:pPr>
+              <a:defRPr sz="1400"/>
+            </a:pPr>
+            <a:r>
+              <a:t>BABOK Guide article on the IIBA knowledge hub (standard). confirm. last checked 2026-10.</a:t>
+            </a:r>
+          </a:p>
+          <a:p>
+            <a:pPr>
+              <a:defRPr sz="1400"/>
+            </a:pPr>
+            <a:r>
+              <a:t>IIBA home (official). https://www.iiba.org/ last checked 2026-10.</a:t>
+            </a:r>
+          </a:p>
+          <a:p>
+            <a:pPr>
+              <a:defRPr sz="1400"/>
+            </a:pPr>
+            <a:r>
+              <a:t>Manifesto for Agile Software Development (standard). https://agilemanifesto.org/ last checked 2026-10.</a:t>
+            </a:r>
+          </a:p>
+          <a:p>
+            <a:pPr>
+              <a:defRPr sz="1400"/>
+            </a:pPr>
+            <a:r>
+              <a:t>Principles behind the Agile Manifesto (standard). https://agilemanifesto.org/principles.html last checked 2026-10.</a:t>
+            </a:r>
+          </a:p>
+          <a:p>
+            <a:pPr>
+              <a:defRPr sz="1400"/>
+            </a:pPr>
+            <a:r>
+              <a:t>OMG, about BPMN 2.0 (standard). https://www.omg.org/spec/BPMN/2.0/About-BPMN last checked 2026-10.</a:t>
+            </a:r>
+          </a:p>
+          <a:p>
+            <a:pPr>
+              <a:defRPr sz="1400"/>
+            </a:pPr>
+            <a:r>
+              <a:t>BPMN 2.0 specification PDF (standard). https://www.omg.org/spec/BPMN/2.0/PDF last checked 2026-10.</a:t>
+            </a:r>
+          </a:p>
+        </p:txBody>
+      </p:sp>
+      <p:sp>
+        <p:nvSpPr>
+          <p:cNvPr id="4" name="TextBox 3"/>
+          <p:cNvSpPr txBox="1"/>
+          <p:nvPr/>
+        </p:nvSpPr>
+        <p:spPr>
+          <a:xfrm>
+            <a:off x="457200" y="5623560"/>
+            <a:ext cx="11155680" cy="1005840"/>
+          </a:xfrm>
+          <a:prstGeom prst="rect">
+            <a:avLst/>
+          </a:prstGeom>
+          <a:noFill/>
+        </p:spPr>
+        <p:txBody>
+          <a:bodyPr wrap="square">
+            <a:spAutoFit/>
+          </a:bodyPr>
+          <a:lstStyle/>
+          <a:p>
+            <a:pPr>
+              <a:defRPr sz="1000"/>
+            </a:pPr>
+            <a:r>
+              <a:t>CypherMonkey Labs · © 2026 CypherMonkeyLabs</a:t>
+            </a:r>
+          </a:p>
+          <a:p>
+            <a:r>
+              <a:t>Independent, free, learning-only student project. Respects every company and vendor. Trademarks belong to their owners. Not affiliated or endorsed. Concerns are removed or corrected promptly via the contact form at https</a:t>
+            </a:r>
+          </a:p>
+        </p:txBody>
+      </p:sp>
+      <p:sp>
+        <p:nvSpPr>
+          <p:cNvPr id="5" name="TextBox 4">
+            <a:hlinkClick r:id="rId2"/>
+          </p:cNvPr>
+          <p:cNvSpPr txBox="1"/>
+          <p:nvPr/>
+        </p:nvSpPr>
+        <p:spPr>
+          <a:xfrm>
+            <a:off x="457200" y="6355080"/>
+            <a:ext cx="2011680" cy="320040"/>
+          </a:xfrm>
+          <a:prstGeom prst="rect">
+            <a:avLst/>
+          </a:prstGeom>
+          <a:noFill/>
+        </p:spPr>
+        <p:txBody>
+          <a:bodyPr wrap="none">
+            <a:spAutoFit/>
+          </a:bodyPr>
+          <a:lstStyle/>
+          <a:p>
+            <a:pPr>
+              <a:defRPr sz="1200"/>
+            </a:pPr>
+            <a:r>
+              <a:t>Website</a:t>
+            </a:r>
+          </a:p>
+        </p:txBody>
+      </p:sp>
+      <p:sp>
+        <p:nvSpPr>
+          <p:cNvPr id="6" name="TextBox 5">
+            <a:hlinkClick r:id="rId3"/>
+          </p:cNvPr>
+          <p:cNvSpPr txBox="1"/>
+          <p:nvPr/>
+        </p:nvSpPr>
+        <p:spPr>
+          <a:xfrm>
+            <a:off x="2560320" y="6355080"/>
+            <a:ext cx="2011680" cy="320040"/>
+          </a:xfrm>
+          <a:prstGeom prst="rect">
+            <a:avLst/>
+          </a:prstGeom>
+          <a:noFill/>
+        </p:spPr>
+        <p:txBody>
+          <a:bodyPr wrap="none">
+            <a:spAutoFit/>
+          </a:bodyPr>
+          <a:lstStyle/>
+          <a:p>
+            <a:pPr>
+              <a:defRPr sz="1200"/>
+            </a:pPr>
+            <a:r>
+              <a:t>GitHub</a:t>
+            </a:r>
+          </a:p>
+        </p:txBody>
+      </p:sp>
+      <p:sp>
+        <p:nvSpPr>
+          <p:cNvPr id="7" name="TextBox 6">
+            <a:hlinkClick r:id="rId4"/>
+          </p:cNvPr>
+          <p:cNvSpPr txBox="1"/>
+          <p:nvPr/>
+        </p:nvSpPr>
+        <p:spPr>
+          <a:xfrm>
+            <a:off x="4663440" y="6355080"/>
+            <a:ext cx="2011680" cy="320040"/>
+          </a:xfrm>
+          <a:prstGeom prst="rect">
+            <a:avLst/>
+          </a:prstGeom>
+          <a:noFill/>
+        </p:spPr>
+        <p:txBody>
+          <a:bodyPr wrap="none">
+            <a:spAutoFit/>
+          </a:bodyPr>
+          <a:lstStyle/>
+          <a:p>
+            <a:pPr>
+              <a:defRPr sz="1200"/>
+            </a:pPr>
+            <a:r>
+              <a:t>Profile</a:t>
+            </a:r>
+          </a:p>
+        </p:txBody>
+      </p:sp>
+    </p:spTree>
+  </p:cSld>
+  <p:clrMapOvr>
+    <a:masterClrMapping/>
+  </p:clrMapOvr>
+</p:sld>
+</file>
+
+<file path=ppt/slides/slide5.xml><?xml version="1.0" encoding="utf-8"?>
+<p:sld xmlns:a="http://schemas.openxmlformats.org/drawingml/2006/main" xmlns:p="http://schemas.openxmlformats.org/presentationml/2006/main" xmlns:r="http://schemas.openxmlformats.org/officeDocument/2006/relationships">
+  <p:cSld>
+    <p:spTree>
+      <p:nvGrpSpPr>
+        <p:cNvPr id="1" name=""/>
+        <p:cNvGrpSpPr/>
+        <p:nvPr/>
+      </p:nvGrpSpPr>
+      <p:grpSpPr/>
+      <p:sp>
+        <p:nvSpPr>
+          <p:cNvPr id="2" name="TextBox 1"/>
+          <p:cNvSpPr txBox="1"/>
+          <p:nvPr/>
+        </p:nvSpPr>
+        <p:spPr>
+          <a:xfrm>
+            <a:off x="457200" y="274320"/>
+            <a:ext cx="11155680" cy="640080"/>
+          </a:xfrm>
+          <a:prstGeom prst="rect">
+            <a:avLst/>
+          </a:prstGeom>
+          <a:noFill/>
+        </p:spPr>
+        <p:txBody>
+          <a:bodyPr wrap="none">
+            <a:spAutoFit/>
+          </a:bodyPr>
+          <a:lstStyle/>
+          <a:p>
+            <a:pPr>
+              <a:defRPr sz="2800" b="1"/>
+            </a:pPr>
+            <a:r>
+              <a:t>Sources and go deeper, continued</a:t>
+            </a:r>
+          </a:p>
+        </p:txBody>
+      </p:sp>
+      <p:sp>
+        <p:nvSpPr>
+          <p:cNvPr id="3" name="TextBox 2"/>
+          <p:cNvSpPr txBox="1"/>
+          <p:nvPr/>
+        </p:nvSpPr>
+        <p:spPr>
+          <a:xfrm>
+            <a:off x="548640" y="1051560"/>
+            <a:ext cx="10972800" cy="4297680"/>
+          </a:xfrm>
+          <a:prstGeom prst="rect">
+            <a:avLst/>
+          </a:prstGeom>
+          <a:noFill/>
+        </p:spPr>
+        <p:txBody>
+          <a:bodyPr wrap="square">
+            <a:spAutoFit/>
+          </a:bodyPr>
+          <a:lstStyle/>
+          <a:p>
+            <a:pPr>
+              <a:defRPr sz="1400"/>
+            </a:pPr>
+            <a:r>
+              <a:t>OMG, about BPMN 2.0.2 (standard). https://www.omg.org/spec/BPMN/2.0.2/About-BPMN last checked 2026-10.</a:t>
+            </a:r>
+          </a:p>
+          <a:p>
+            <a:pPr>
+              <a:defRPr sz="1400"/>
+            </a:pPr>
+            <a:r>
+              <a:t>OMG, about UML 2.5.1 (standard). https://www.omg.org/spec/UML/2.5.1/About-UML last checked 2026-10.</a:t>
+            </a:r>
+          </a:p>
+          <a:p>
+            <a:pPr>
+              <a:defRPr sz="1400"/>
+            </a:pPr>
+            <a:r>
+              <a:t>UML 2.5.1 specification PDF (standard). https://www.omg.org/spec/UML/2.5.1/PDF last checked 2026-10.</a:t>
+            </a:r>
+          </a:p>
+          <a:p>
+            <a:pPr>
+              <a:defRPr sz="1400"/>
+            </a:pPr>
+            <a:r>
+              <a:t>IIBA membership (community). https://www.iiba.org/membership/ last checked 2026-10.</a:t>
+            </a:r>
+          </a:p>
+          <a:p>
+            <a:pPr>
+              <a:defRPr sz="1400"/>
+            </a:pPr>
+            <a:r>
+              <a:t>OMG managed communities (community). https://www.omg.org/communities/ last checked 2026-10.</a:t>
+            </a:r>
+          </a:p>
+          <a:p>
+            <a:pPr>
+              <a:defRPr sz="1400"/>
+            </a:pPr>
+            <a:r>
+              <a:t>About IIBA (official). https://www.iiba.org/about-iiba/ last checked 2026-10.</a:t>
             </a:r>
           </a:p>
         </p:txBody>

--- a/downloads/rooms/ecosystem.pptx
+++ b/downloads/rooms/ecosystem.pptx
@@ -10,6 +10,7 @@
     <p:sldId id="258" r:id="rId9"/>
     <p:sldId id="259" r:id="rId10"/>
     <p:sldId id="260" r:id="rId11"/>
+    <p:sldId id="261" r:id="rId12"/>
   </p:sldIdLst>
   <p:sldSz cx="12191695" cy="6858000" type="screen4x3"/>
   <p:notesSz cx="6858000" cy="9144000"/>
@@ -3149,7 +3150,7 @@
               <a:defRPr sz="1800"/>
             </a:pPr>
             <a:r>
-              <a:t>Glossary links, sister roles, and future hooks.</a:t>
+              <a:t>Glossary, mind map, sister technologies, integrations, bridges, and future hooks.</a:t>
             </a:r>
           </a:p>
           <a:p>
@@ -3193,7 +3194,7 @@
           </a:p>
           <a:p>
             <a:r>
-              <a:t>Independent, free, learning-only student project. Respects every company and vendor. Trademarks belong to their owners. Not affiliated or endorsed. Concerns are removed or corrected promptly via the contact form at https</a:t>
+              <a:t>Independent, free, learning-only student project. Respects every company and vendor. Trademarks belong to their owners. Not affiliated or endorsed. Names in the contact-center rooms are citations of pages opened in Octob</a:t>
             </a:r>
           </a:p>
         </p:txBody>
@@ -3372,7 +3373,7 @@
               <a:defRPr sz="1800"/>
             </a:pPr>
             <a:r>
-              <a:t>The same techniques show up in product ownership, project delivery, data work, and change. Shared techniques do not mean shared authority. Ask who decides the need, who decides the date, and who accepts the result. This lab uses the BABOK hub as the core public map and cites neighbors only where a page opened.</a:t>
+              <a:t>Business analysis sits beside product ownership, project delivery, data, architecture, and change. Shared techniques still need a named decision maker. For contact centers, the mind map in this room links the person's goal to channels, the journey and the blueprint, the queue, the agent and the CRM profile, the measures, and the three migration workstreams. Sister technologies are only the ones the feature overview describes: bots, CRM profiles, workforce scheduling, screen recording, flows that call other systems, and email. Future hooks stop where the opened page stops.</a:t>
             </a:r>
           </a:p>
         </p:txBody>
@@ -3408,7 +3409,7 @@
           </a:p>
           <a:p>
             <a:r>
-              <a:t>Independent, free, learning-only student project. Respects every company and vendor. Trademarks belong to their owners. Not affiliated or endorsed. Concerns are removed or corrected promptly via the contact form at https</a:t>
+              <a:t>Independent, free, learning-only student project. Respects every company and vendor. Trademarks belong to their owners. Not affiliated or endorsed. Names in the contact-center rooms are citations of pages opened in Octob</a:t>
             </a:r>
           </a:p>
         </p:txBody>
@@ -3631,7 +3632,7 @@
           </a:p>
           <a:p>
             <a:r>
-              <a:t>Independent, free, learning-only student project. Respects every company and vendor. Trademarks belong to their owners. Not affiliated or endorsed. Concerns are removed or corrected promptly via the contact form at https</a:t>
+              <a:t>Independent, free, learning-only student project. Respects every company and vendor. Trademarks belong to their owners. Not affiliated or endorsed. Names in the contact-center rooms are citations of pages opened in Octob</a:t>
             </a:r>
           </a:p>
         </p:txBody>
@@ -3894,7 +3895,7 @@
           </a:p>
           <a:p>
             <a:r>
-              <a:t>Independent, free, learning-only student project. Respects every company and vendor. Trademarks belong to their owners. Not affiliated or endorsed. Concerns are removed or corrected promptly via the contact form at https</a:t>
+              <a:t>Independent, free, learning-only student project. Respects every company and vendor. Trademarks belong to their owners. Not affiliated or endorsed. Names in the contact-center rooms are citations of pages opened in Octob</a:t>
             </a:r>
           </a:p>
         </p:txBody>
@@ -4116,6 +4117,14 @@
               <a:t>About IIBA (official). https://www.iiba.org/about-iiba/ last checked 2026-10.</a:t>
             </a:r>
           </a:p>
+          <a:p>
+            <a:pPr>
+              <a:defRPr sz="1400"/>
+            </a:pPr>
+            <a:r>
+              <a:t>NN/g, Journey Mapping 101 (official). https://www.nngroup.com/articles/journey-mapping-101/ last checked 2026-10.</a:t>
+            </a:r>
+          </a:p>
         </p:txBody>
       </p:sp>
       <p:sp>
@@ -4149,7 +4158,254 @@
           </a:p>
           <a:p>
             <a:r>
-              <a:t>Independent, free, learning-only student project. Respects every company and vendor. Trademarks belong to their owners. Not affiliated or endorsed. Concerns are removed or corrected promptly via the contact form at https</a:t>
+              <a:t>Independent, free, learning-only student project. Respects every company and vendor. Trademarks belong to their owners. Not affiliated or endorsed. Names in the contact-center rooms are citations of pages opened in Octob</a:t>
+            </a:r>
+          </a:p>
+        </p:txBody>
+      </p:sp>
+      <p:sp>
+        <p:nvSpPr>
+          <p:cNvPr id="5" name="TextBox 4">
+            <a:hlinkClick r:id="rId2"/>
+          </p:cNvPr>
+          <p:cNvSpPr txBox="1"/>
+          <p:nvPr/>
+        </p:nvSpPr>
+        <p:spPr>
+          <a:xfrm>
+            <a:off x="457200" y="6355080"/>
+            <a:ext cx="2011680" cy="320040"/>
+          </a:xfrm>
+          <a:prstGeom prst="rect">
+            <a:avLst/>
+          </a:prstGeom>
+          <a:noFill/>
+        </p:spPr>
+        <p:txBody>
+          <a:bodyPr wrap="none">
+            <a:spAutoFit/>
+          </a:bodyPr>
+          <a:lstStyle/>
+          <a:p>
+            <a:pPr>
+              <a:defRPr sz="1200"/>
+            </a:pPr>
+            <a:r>
+              <a:t>Website</a:t>
+            </a:r>
+          </a:p>
+        </p:txBody>
+      </p:sp>
+      <p:sp>
+        <p:nvSpPr>
+          <p:cNvPr id="6" name="TextBox 5">
+            <a:hlinkClick r:id="rId3"/>
+          </p:cNvPr>
+          <p:cNvSpPr txBox="1"/>
+          <p:nvPr/>
+        </p:nvSpPr>
+        <p:spPr>
+          <a:xfrm>
+            <a:off x="2560320" y="6355080"/>
+            <a:ext cx="2011680" cy="320040"/>
+          </a:xfrm>
+          <a:prstGeom prst="rect">
+            <a:avLst/>
+          </a:prstGeom>
+          <a:noFill/>
+        </p:spPr>
+        <p:txBody>
+          <a:bodyPr wrap="none">
+            <a:spAutoFit/>
+          </a:bodyPr>
+          <a:lstStyle/>
+          <a:p>
+            <a:pPr>
+              <a:defRPr sz="1200"/>
+            </a:pPr>
+            <a:r>
+              <a:t>GitHub</a:t>
+            </a:r>
+          </a:p>
+        </p:txBody>
+      </p:sp>
+      <p:sp>
+        <p:nvSpPr>
+          <p:cNvPr id="7" name="TextBox 6">
+            <a:hlinkClick r:id="rId4"/>
+          </p:cNvPr>
+          <p:cNvSpPr txBox="1"/>
+          <p:nvPr/>
+        </p:nvSpPr>
+        <p:spPr>
+          <a:xfrm>
+            <a:off x="4663440" y="6355080"/>
+            <a:ext cx="2011680" cy="320040"/>
+          </a:xfrm>
+          <a:prstGeom prst="rect">
+            <a:avLst/>
+          </a:prstGeom>
+          <a:noFill/>
+        </p:spPr>
+        <p:txBody>
+          <a:bodyPr wrap="none">
+            <a:spAutoFit/>
+          </a:bodyPr>
+          <a:lstStyle/>
+          <a:p>
+            <a:pPr>
+              <a:defRPr sz="1200"/>
+            </a:pPr>
+            <a:r>
+              <a:t>Profile</a:t>
+            </a:r>
+          </a:p>
+        </p:txBody>
+      </p:sp>
+    </p:spTree>
+  </p:cSld>
+  <p:clrMapOvr>
+    <a:masterClrMapping/>
+  </p:clrMapOvr>
+</p:sld>
+</file>
+
+<file path=ppt/slides/slide6.xml><?xml version="1.0" encoding="utf-8"?>
+<p:sld xmlns:a="http://schemas.openxmlformats.org/drawingml/2006/main" xmlns:p="http://schemas.openxmlformats.org/presentationml/2006/main" xmlns:r="http://schemas.openxmlformats.org/officeDocument/2006/relationships">
+  <p:cSld>
+    <p:spTree>
+      <p:nvGrpSpPr>
+        <p:cNvPr id="1" name=""/>
+        <p:cNvGrpSpPr/>
+        <p:nvPr/>
+      </p:nvGrpSpPr>
+      <p:grpSpPr/>
+      <p:sp>
+        <p:nvSpPr>
+          <p:cNvPr id="2" name="TextBox 1"/>
+          <p:cNvSpPr txBox="1"/>
+          <p:nvPr/>
+        </p:nvSpPr>
+        <p:spPr>
+          <a:xfrm>
+            <a:off x="457200" y="274320"/>
+            <a:ext cx="11155680" cy="640080"/>
+          </a:xfrm>
+          <a:prstGeom prst="rect">
+            <a:avLst/>
+          </a:prstGeom>
+          <a:noFill/>
+        </p:spPr>
+        <p:txBody>
+          <a:bodyPr wrap="none">
+            <a:spAutoFit/>
+          </a:bodyPr>
+          <a:lstStyle/>
+          <a:p>
+            <a:pPr>
+              <a:defRPr sz="2800" b="1"/>
+            </a:pPr>
+            <a:r>
+              <a:t>Sources and go deeper, continued</a:t>
+            </a:r>
+          </a:p>
+        </p:txBody>
+      </p:sp>
+      <p:sp>
+        <p:nvSpPr>
+          <p:cNvPr id="3" name="TextBox 2"/>
+          <p:cNvSpPr txBox="1"/>
+          <p:nvPr/>
+        </p:nvSpPr>
+        <p:spPr>
+          <a:xfrm>
+            <a:off x="548640" y="1051560"/>
+            <a:ext cx="10972800" cy="4297680"/>
+          </a:xfrm>
+          <a:prstGeom prst="rect">
+            <a:avLst/>
+          </a:prstGeom>
+          <a:noFill/>
+        </p:spPr>
+        <p:txBody>
+          <a:bodyPr wrap="square">
+            <a:spAutoFit/>
+          </a:bodyPr>
+          <a:lstStyle/>
+          <a:p>
+            <a:pPr>
+              <a:defRPr sz="1400"/>
+            </a:pPr>
+            <a:r>
+              <a:t>Connect Customer feature overview (official). https://docs.aws.amazon.com/connect/latest/adminguide/connect-feature-overview.html last checked 2026-10.</a:t>
+            </a:r>
+          </a:p>
+          <a:p>
+            <a:pPr>
+              <a:defRPr sz="1400"/>
+            </a:pPr>
+            <a:r>
+              <a:t>Connect Customer, Set up WhatsApp Business messaging (official). https://docs.aws.amazon.com/connect/latest/adminguide/whatsapp-integration.html last checked 2026-10.</a:t>
+            </a:r>
+          </a:p>
+          <a:p>
+            <a:pPr>
+              <a:defRPr sz="1400"/>
+            </a:pPr>
+            <a:r>
+              <a:t>Connect Customer metric definitions (official). https://docs.aws.amazon.com/connect/latest/adminguide/metrics-definitions.html last checked 2026-10.</a:t>
+            </a:r>
+          </a:p>
+          <a:p>
+            <a:pPr>
+              <a:defRPr sz="1400"/>
+            </a:pPr>
+            <a:r>
+              <a:t>AWS Prescriptive Guidance, project phases and workstreams (official). https://docs.aws.amazon.com/prescriptive-guidance/latest/strategy-migration-connect/workstreams.html last checked 2026-10.</a:t>
+            </a:r>
+          </a:p>
+          <a:p>
+            <a:pPr>
+              <a:defRPr sz="1400"/>
+            </a:pPr>
+            <a:r>
+              <a:t>AWS Prescriptive Guidance, user journeys workstream (official). https://docs.aws.amazon.com/prescriptive-guidance/latest/strategy-migration-connect/user-journeys.html last checked 2026-10.</a:t>
+            </a:r>
+          </a:p>
+        </p:txBody>
+      </p:sp>
+      <p:sp>
+        <p:nvSpPr>
+          <p:cNvPr id="4" name="TextBox 3"/>
+          <p:cNvSpPr txBox="1"/>
+          <p:nvPr/>
+        </p:nvSpPr>
+        <p:spPr>
+          <a:xfrm>
+            <a:off x="457200" y="5623560"/>
+            <a:ext cx="11155680" cy="1005840"/>
+          </a:xfrm>
+          <a:prstGeom prst="rect">
+            <a:avLst/>
+          </a:prstGeom>
+          <a:noFill/>
+        </p:spPr>
+        <p:txBody>
+          <a:bodyPr wrap="square">
+            <a:spAutoFit/>
+          </a:bodyPr>
+          <a:lstStyle/>
+          <a:p>
+            <a:pPr>
+              <a:defRPr sz="1000"/>
+            </a:pPr>
+            <a:r>
+              <a:t>CypherMonkey Labs · © 2026 CypherMonkeyLabs</a:t>
+            </a:r>
+          </a:p>
+          <a:p>
+            <a:r>
+              <a:t>Independent, free, learning-only student project. Respects every company and vendor. Trademarks belong to their owners. Not affiliated or endorsed. Names in the contact-center rooms are citations of pages opened in Octob</a:t>
             </a:r>
           </a:p>
         </p:txBody>
